--- a/Java_Week10_IO.pptx
+++ b/Java_Week10_IO.pptx
@@ -3089,7 +3089,7 @@
           <a:p>
             <a:fld id="{A1E4D65A-0EC1-4CBC-8539-F9FD2B92F981}" type="datetimeFigureOut">
               <a:rPr kumimoji="1" lang="ja-JP" altLang="en-US" smtClean="0"/>
-              <a:t>2026/9/13</a:t>
+              <a:t>2026/9/24</a:t>
             </a:fld>
             <a:endParaRPr kumimoji="1" lang="ja-JP" altLang="en-US"/>
           </a:p>
@@ -4826,13 +4826,13 @@
           <p:nvPr userDrawn="1"/>
         </p:nvPicPr>
         <p:blipFill>
-          <a:blip r:embed="rId9" cstate="screen">
+          <a:blip cstate="screen">
             <a:extLst>
               <a:ext uri="{28A0092B-C50C-407E-A947-70E740481C1C}">
                 <a14:useLocalDpi xmlns:a14="http://schemas.microsoft.com/office/drawing/2010/main"/>
               </a:ext>
               <a:ext uri="{96DAC541-7B7A-43D3-8B79-37D633B846F1}">
-                <asvg:svgBlip xmlns:asvg="http://schemas.microsoft.com/office/drawing/2016/SVG/main" r:embed="rId10"/>
+                <asvg:svgBlip xmlns:asvg="http://schemas.microsoft.com/office/drawing/2016/SVG/main" r:embed="rId9"/>
               </a:ext>
             </a:extLst>
           </a:blip>
@@ -5451,7 +5451,7 @@
           <a:p>
             <a:fld id="{A1E4D65A-0EC1-4CBC-8539-F9FD2B92F981}" type="datetimeFigureOut">
               <a:rPr kumimoji="1" lang="ja-JP" altLang="en-US" smtClean="0"/>
-              <a:t>2026/9/13</a:t>
+              <a:t>2026/9/24</a:t>
             </a:fld>
             <a:endParaRPr kumimoji="1" lang="ja-JP" altLang="en-US"/>
           </a:p>
